--- a/session_03_probabilistic_programming/probabilistic_programming.pptx
+++ b/session_03_probabilistic_programming/probabilistic_programming.pptx
@@ -1756,7 +1756,7 @@
           <a:p>
             <a:fld id="{43E8DC33-9320-4328-B019-E0163181A3C7}" type="datetimeFigureOut">
               <a:rPr lang="LID4096" smtClean="0"/>
-              <a:t>10/21/25</a:t>
+              <a:t>10/21/26</a:t>
             </a:fld>
             <a:endParaRPr lang="LID4096"/>
           </a:p>
@@ -2748,7 +2748,7 @@
           <a:p>
             <a:fld id="{DF77F8B7-67C5-4A34-9D89-4D3855478B38}" type="datetime1">
               <a:rPr lang="LID4096" smtClean="0"/>
-              <a:t>10/21/25</a:t>
+              <a:t>10/21/26</a:t>
             </a:fld>
             <a:endParaRPr lang="LID4096"/>
           </a:p>
@@ -2918,7 +2918,7 @@
           <a:p>
             <a:fld id="{2E01C644-7963-4809-9FF7-F9DF3305E547}" type="datetime1">
               <a:rPr lang="LID4096" smtClean="0"/>
-              <a:t>10/21/25</a:t>
+              <a:t>10/21/26</a:t>
             </a:fld>
             <a:endParaRPr lang="LID4096"/>
           </a:p>
@@ -3098,7 +3098,7 @@
           <a:p>
             <a:fld id="{B04ECBB3-0644-4928-A7BE-41D4F8638333}" type="datetime1">
               <a:rPr lang="LID4096" smtClean="0"/>
-              <a:t>10/21/25</a:t>
+              <a:t>10/21/26</a:t>
             </a:fld>
             <a:endParaRPr lang="LID4096"/>
           </a:p>
@@ -3268,7 +3268,7 @@
           <a:p>
             <a:fld id="{1E35827A-731F-4B00-B107-0A188EC60DAC}" type="datetime1">
               <a:rPr lang="LID4096" smtClean="0"/>
-              <a:t>10/21/25</a:t>
+              <a:t>10/21/26</a:t>
             </a:fld>
             <a:endParaRPr lang="LID4096"/>
           </a:p>
@@ -3514,7 +3514,7 @@
           <a:p>
             <a:fld id="{D8E46D72-F593-4B40-B106-3EC660BC654E}" type="datetime1">
               <a:rPr lang="LID4096" smtClean="0"/>
-              <a:t>10/21/25</a:t>
+              <a:t>10/21/26</a:t>
             </a:fld>
             <a:endParaRPr lang="LID4096"/>
           </a:p>
@@ -3746,7 +3746,7 @@
           <a:p>
             <a:fld id="{5D9F6076-8E4C-42D8-AF17-F97426B5A340}" type="datetime1">
               <a:rPr lang="LID4096" smtClean="0"/>
-              <a:t>10/21/25</a:t>
+              <a:t>10/21/26</a:t>
             </a:fld>
             <a:endParaRPr lang="LID4096"/>
           </a:p>
@@ -4113,7 +4113,7 @@
           <a:p>
             <a:fld id="{CD567D47-60FF-4C64-862B-023FFBAD268A}" type="datetime1">
               <a:rPr lang="LID4096" smtClean="0"/>
-              <a:t>10/21/25</a:t>
+              <a:t>10/21/26</a:t>
             </a:fld>
             <a:endParaRPr lang="LID4096"/>
           </a:p>
@@ -4231,7 +4231,7 @@
           <a:p>
             <a:fld id="{EFEF1EEE-FEBE-4D06-A0A4-D3C86B39934D}" type="datetime1">
               <a:rPr lang="LID4096" smtClean="0"/>
-              <a:t>10/21/25</a:t>
+              <a:t>10/21/26</a:t>
             </a:fld>
             <a:endParaRPr lang="LID4096"/>
           </a:p>
@@ -4326,7 +4326,7 @@
           <a:p>
             <a:fld id="{EACC84AE-54D1-4B7D-8A6B-EF7CB9635BE3}" type="datetime1">
               <a:rPr lang="LID4096" smtClean="0"/>
-              <a:t>10/21/25</a:t>
+              <a:t>10/21/26</a:t>
             </a:fld>
             <a:endParaRPr lang="LID4096"/>
           </a:p>
@@ -4603,7 +4603,7 @@
           <a:p>
             <a:fld id="{B227948E-2D54-4984-8A4B-70C1CA7F957B}" type="datetime1">
               <a:rPr lang="LID4096" smtClean="0"/>
-              <a:t>10/21/25</a:t>
+              <a:t>10/21/26</a:t>
             </a:fld>
             <a:endParaRPr lang="LID4096"/>
           </a:p>
@@ -4860,7 +4860,7 @@
           <a:p>
             <a:fld id="{378B6861-8171-4936-A2D2-42381F04264D}" type="datetime1">
               <a:rPr lang="LID4096" smtClean="0"/>
-              <a:t>10/21/25</a:t>
+              <a:t>10/21/26</a:t>
             </a:fld>
             <a:endParaRPr lang="LID4096"/>
           </a:p>
@@ -5073,7 +5073,7 @@
           <a:p>
             <a:fld id="{6D1357CB-971F-4825-B9C7-A50F10DC2193}" type="datetime1">
               <a:rPr lang="LID4096" smtClean="0"/>
-              <a:t>10/21/25</a:t>
+              <a:t>10/21/26</a:t>
             </a:fld>
             <a:endParaRPr lang="LID4096"/>
           </a:p>
@@ -14274,21 +14274,7 @@
                 <a:latin typeface="Source Sans Pro Light" panose="020B0403030403020204" pitchFamily="34" charset="0"/>
                 <a:ea typeface="Source Sans Pro Light" panose="020B0403030403020204" pitchFamily="34" charset="0"/>
               </a:rPr>
-              <a:t>We need </a:t>
-            </a:r>
-            <a:r>
-              <a:rPr lang="en-US" sz="2000" dirty="0" err="1">
-                <a:latin typeface="Source Sans Pro Light" panose="020B0403030403020204" pitchFamily="34" charset="0"/>
-                <a:ea typeface="Source Sans Pro Light" panose="020B0403030403020204" pitchFamily="34" charset="0"/>
-              </a:rPr>
-              <a:t>PPLs</a:t>
-            </a:r>
-            <a:r>
-              <a:rPr lang="en-US" sz="2000" dirty="0">
-                <a:latin typeface="Source Sans Pro Light" panose="020B0403030403020204" pitchFamily="34" charset="0"/>
-                <a:ea typeface="Source Sans Pro Light" panose="020B0403030403020204" pitchFamily="34" charset="0"/>
-              </a:rPr>
-              <a:t> to design the model and do the statistical inference.</a:t>
+              <a:t>We need PPLs to design and fit the statistical model.</a:t>
             </a:r>
           </a:p>
           <a:p>
@@ -14303,7 +14289,7 @@
                 <a:latin typeface="Source Sans Pro Light" panose="020B0403030403020204" pitchFamily="34" charset="0"/>
                 <a:ea typeface="Source Sans Pro Light" panose="020B0403030403020204" pitchFamily="34" charset="0"/>
               </a:rPr>
-              <a:t>After the inference is completed, we again need imperative programing to diagnose the outputs, analyze results, prepare visualizations ...</a:t>
+              <a:t>After model fitting is completed, we again need imperative programing to diagnose the outputs, analyze results, prepare visualizations ...</a:t>
             </a:r>
           </a:p>
         </p:txBody>
@@ -14433,15 +14419,6 @@
           <a:bodyPr/>
           <a:lstStyle/>
           <a:p>
-            <a:r>
-              <a:rPr lang="en-US" sz="2000" dirty="0">
-                <a:latin typeface="Source Sans Pro Light" panose="020B0403030403020204" pitchFamily="34" charset="0"/>
-                <a:ea typeface="Source Sans Pro Light" panose="020B0403030403020204" pitchFamily="34" charset="0"/>
-              </a:rPr>
-              <a:t>Problems we are solving with probabilistic programming are in its essence unsolvable. There are infinite ways to generate the given data and no mechanism to prove which of them is correct.</a:t>
-            </a:r>
-          </a:p>
-          <a:p>
             <a:endParaRPr lang="en-US" sz="2000" dirty="0">
               <a:latin typeface="Source Sans Pro Light" panose="020B0403030403020204" pitchFamily="34" charset="0"/>
               <a:ea typeface="Source Sans Pro Light" panose="020B0403030403020204" pitchFamily="34" charset="0"/>
@@ -14453,7 +14430,7 @@
                 <a:latin typeface="Source Sans Pro Light" panose="020B0403030403020204" pitchFamily="34" charset="0"/>
                 <a:ea typeface="Source Sans Pro Light" panose="020B0403030403020204" pitchFamily="34" charset="0"/>
               </a:rPr>
-              <a:t>We are not developing a perfect model, but a useful model!</a:t>
+              <a:t>Problems we are solving with probabilistic programming are in its essence unsolvable. There are infinite ways to generate the given data and no mechanism to prove which of them is correct.</a:t>
             </a:r>
           </a:p>
           <a:p>
@@ -14468,7 +14445,7 @@
                 <a:latin typeface="Source Sans Pro Light" panose="020B0403030403020204" pitchFamily="34" charset="0"/>
                 <a:ea typeface="Source Sans Pro Light" panose="020B0403030403020204" pitchFamily="34" charset="0"/>
               </a:rPr>
-              <a:t>Probabilistic model development is an iterative process guided by knowledge, experience and intuition.</a:t>
+              <a:t>We are not developing a perfect model, but a useful model!</a:t>
             </a:r>
           </a:p>
           <a:p>
@@ -14483,14 +14460,8 @@
                 <a:latin typeface="Source Sans Pro Light" panose="020B0403030403020204" pitchFamily="34" charset="0"/>
                 <a:ea typeface="Source Sans Pro Light" panose="020B0403030403020204" pitchFamily="34" charset="0"/>
               </a:rPr>
-              <a:t>Do not get discouraged if your initial models fail in a spectacular manner.</a:t>
-            </a:r>
-          </a:p>
-          <a:p>
-            <a:endParaRPr lang="en-US" sz="2000" dirty="0">
-              <a:latin typeface="Source Sans Pro Light" panose="020B0403030403020204" pitchFamily="34" charset="0"/>
-              <a:ea typeface="Source Sans Pro Light" panose="020B0403030403020204" pitchFamily="34" charset="0"/>
-            </a:endParaRPr>
+              <a:t>Probabilistic model development is an iterative process guided by knowledge, experience and intuition.</a:t>
+            </a:r>
           </a:p>
           <a:p>
             <a:pPr marL="457200" lvl="1" indent="0">

--- a/session_03_probabilistic_programming/probabilistic_programming.pptx
+++ b/session_03_probabilistic_programming/probabilistic_programming.pptx
@@ -5,7 +5,7 @@
     <p:sldMasterId id="2147483660" r:id="rId1"/>
   </p:sldMasterIdLst>
   <p:notesMasterIdLst>
-    <p:notesMasterId r:id="rId36"/>
+    <p:notesMasterId r:id="rId35"/>
   </p:notesMasterIdLst>
   <p:sldIdLst>
     <p:sldId id="295" r:id="rId2"/>
@@ -38,10 +38,9 @@
     <p:sldId id="324" r:id="rId29"/>
     <p:sldId id="325" r:id="rId30"/>
     <p:sldId id="326" r:id="rId31"/>
-    <p:sldId id="327" r:id="rId32"/>
-    <p:sldId id="329" r:id="rId33"/>
-    <p:sldId id="330" r:id="rId34"/>
-    <p:sldId id="332" r:id="rId35"/>
+    <p:sldId id="329" r:id="rId32"/>
+    <p:sldId id="330" r:id="rId33"/>
+    <p:sldId id="332" r:id="rId34"/>
   </p:sldIdLst>
   <p:sldSz cx="9144000" cy="5715000" type="screen16x10"/>
   <p:notesSz cx="6858000" cy="9144000"/>
@@ -2355,7 +2354,7 @@
     </p:spTree>
     <p:extLst>
       <p:ext uri="{BB962C8B-B14F-4D97-AF65-F5344CB8AC3E}">
-        <p14:creationId xmlns:p14="http://schemas.microsoft.com/office/powerpoint/2010/main" val="1919024623"/>
+        <p14:creationId xmlns:p14="http://schemas.microsoft.com/office/powerpoint/2010/main" val="89697770"/>
       </p:ext>
     </p:extLst>
   </p:cSld>
@@ -2439,7 +2438,7 @@
     </p:spTree>
     <p:extLst>
       <p:ext uri="{BB962C8B-B14F-4D97-AF65-F5344CB8AC3E}">
-        <p14:creationId xmlns:p14="http://schemas.microsoft.com/office/powerpoint/2010/main" val="89697770"/>
+        <p14:creationId xmlns:p14="http://schemas.microsoft.com/office/powerpoint/2010/main" val="101558186"/>
       </p:ext>
     </p:extLst>
   </p:cSld>
@@ -2515,90 +2514,6 @@
             <a:fld id="{445B5041-6ABE-482D-8014-87CF18E72B1E}" type="slidenum">
               <a:rPr lang="LID4096" smtClean="0"/>
               <a:t>33</a:t>
-            </a:fld>
-            <a:endParaRPr lang="LID4096"/>
-          </a:p>
-        </p:txBody>
-      </p:sp>
-    </p:spTree>
-    <p:extLst>
-      <p:ext uri="{BB962C8B-B14F-4D97-AF65-F5344CB8AC3E}">
-        <p14:creationId xmlns:p14="http://schemas.microsoft.com/office/powerpoint/2010/main" val="101558186"/>
-      </p:ext>
-    </p:extLst>
-  </p:cSld>
-  <p:clrMapOvr>
-    <a:masterClrMapping/>
-  </p:clrMapOvr>
-</p:notes>
-</file>
-
-<file path=ppt/notesSlides/notesSlide7.xml><?xml version="1.0" encoding="utf-8"?>
-<p:notes xmlns:a="http://schemas.openxmlformats.org/drawingml/2006/main" xmlns:r="http://schemas.openxmlformats.org/officeDocument/2006/relationships" xmlns:p="http://schemas.openxmlformats.org/presentationml/2006/main">
-  <p:cSld>
-    <p:spTree>
-      <p:nvGrpSpPr>
-        <p:cNvPr id="1" name=""/>
-        <p:cNvGrpSpPr/>
-        <p:nvPr/>
-      </p:nvGrpSpPr>
-      <p:grpSpPr>
-        <a:xfrm>
-          <a:off x="0" y="0"/>
-          <a:ext cx="0" cy="0"/>
-          <a:chOff x="0" y="0"/>
-          <a:chExt cx="0" cy="0"/>
-        </a:xfrm>
-      </p:grpSpPr>
-      <p:sp>
-        <p:nvSpPr>
-          <p:cNvPr id="2" name="Slide Image Placeholder 1"/>
-          <p:cNvSpPr>
-            <a:spLocks noGrp="1" noRot="1" noChangeAspect="1"/>
-          </p:cNvSpPr>
-          <p:nvPr>
-            <p:ph type="sldImg"/>
-          </p:nvPr>
-        </p:nvSpPr>
-        <p:spPr/>
-      </p:sp>
-      <p:sp>
-        <p:nvSpPr>
-          <p:cNvPr id="3" name="Notes Placeholder 2"/>
-          <p:cNvSpPr>
-            <a:spLocks noGrp="1"/>
-          </p:cNvSpPr>
-          <p:nvPr>
-            <p:ph type="body" idx="1"/>
-          </p:nvPr>
-        </p:nvSpPr>
-        <p:spPr/>
-        <p:txBody>
-          <a:bodyPr/>
-          <a:lstStyle/>
-          <a:p>
-            <a:endParaRPr lang="LID4096" dirty="0"/>
-          </a:p>
-        </p:txBody>
-      </p:sp>
-      <p:sp>
-        <p:nvSpPr>
-          <p:cNvPr id="4" name="Slide Number Placeholder 3"/>
-          <p:cNvSpPr>
-            <a:spLocks noGrp="1"/>
-          </p:cNvSpPr>
-          <p:nvPr>
-            <p:ph type="sldNum" sz="quarter" idx="5"/>
-          </p:nvPr>
-        </p:nvSpPr>
-        <p:spPr/>
-        <p:txBody>
-          <a:bodyPr/>
-          <a:lstStyle/>
-          <a:p>
-            <a:fld id="{445B5041-6ABE-482D-8014-87CF18E72B1E}" type="slidenum">
-              <a:rPr lang="LID4096" smtClean="0"/>
-              <a:t>34</a:t>
             </a:fld>
             <a:endParaRPr lang="LID4096"/>
           </a:p>
@@ -12507,43 +12422,6 @@
           <a:chExt cx="0" cy="0"/>
         </a:xfrm>
       </p:grpSpPr>
-      <p:pic>
-        <p:nvPicPr>
-          <p:cNvPr id="4" name="Picture 3" descr="Logo, company name&#10;&#10;Description automatically generated">
-            <a:extLst>
-              <a:ext uri="{FF2B5EF4-FFF2-40B4-BE49-F238E27FC236}">
-                <a16:creationId xmlns:a16="http://schemas.microsoft.com/office/drawing/2014/main" id="{B843C928-BA92-4E3B-A771-AAED350D87B3}"/>
-              </a:ext>
-            </a:extLst>
-          </p:cNvPr>
-          <p:cNvPicPr>
-            <a:picLocks noChangeAspect="1"/>
-          </p:cNvPicPr>
-          <p:nvPr/>
-        </p:nvPicPr>
-        <p:blipFill>
-          <a:blip r:embed="rId3">
-            <a:alphaModFix amt="5000"/>
-            <a:extLst>
-              <a:ext uri="{28A0092B-C50C-407E-A947-70E740481C1C}">
-                <a14:useLocalDpi xmlns:a14="http://schemas.microsoft.com/office/drawing/2010/main" val="0"/>
-              </a:ext>
-            </a:extLst>
-          </a:blip>
-          <a:stretch>
-            <a:fillRect/>
-          </a:stretch>
-        </p:blipFill>
-        <p:spPr>
-          <a:xfrm>
-            <a:off x="2030642" y="309365"/>
-            <a:ext cx="5082715" cy="5096270"/>
-          </a:xfrm>
-          <a:prstGeom prst="rect">
-            <a:avLst/>
-          </a:prstGeom>
-        </p:spPr>
-      </p:pic>
       <p:sp>
         <p:nvSpPr>
           <p:cNvPr id="2" name="Title 1">
@@ -12572,256 +12450,12 @@
                 <a:latin typeface="Source Sans Pro" panose="020B0503030403020204" pitchFamily="34" charset="0"/>
                 <a:ea typeface="Source Sans Pro" panose="020B0503030403020204" pitchFamily="34" charset="0"/>
               </a:rPr>
-              <a:t>Log posterior probability</a:t>
+              <a:t>Presenting models</a:t>
             </a:r>
             <a:endParaRPr lang="LID4096" sz="2800" b="1" dirty="0">
               <a:latin typeface="Source Sans Pro" panose="020B0503030403020204" pitchFamily="34" charset="0"/>
               <a:ea typeface="Source Sans Pro" panose="020B0503030403020204" pitchFamily="34" charset="0"/>
             </a:endParaRPr>
-          </a:p>
-        </p:txBody>
-      </p:sp>
-      <p:sp>
-        <p:nvSpPr>
-          <p:cNvPr id="3" name="Content Placeholder 2">
-            <a:extLst>
-              <a:ext uri="{FF2B5EF4-FFF2-40B4-BE49-F238E27FC236}">
-                <a16:creationId xmlns:a16="http://schemas.microsoft.com/office/drawing/2014/main" id="{02774E1B-7E41-4FBF-B60A-597EA771BF83}"/>
-              </a:ext>
-            </a:extLst>
-          </p:cNvPr>
-          <p:cNvSpPr>
-            <a:spLocks noGrp="1"/>
-          </p:cNvSpPr>
-          <p:nvPr>
-            <p:ph idx="1"/>
-          </p:nvPr>
-        </p:nvSpPr>
-        <p:spPr>
-          <a:xfrm>
-            <a:off x="628649" y="1521354"/>
-            <a:ext cx="7886699" cy="3626115"/>
-          </a:xfrm>
-        </p:spPr>
-        <p:txBody>
-          <a:bodyPr>
-            <a:normAutofit fontScale="92500" lnSpcReduction="10000"/>
-          </a:bodyPr>
-          <a:lstStyle/>
-          <a:p>
-            <a:r>
-              <a:rPr lang="en-US" sz="2000" dirty="0">
-                <a:latin typeface="Source Sans Pro Light" panose="020B0403030403020204" pitchFamily="34" charset="0"/>
-                <a:ea typeface="Source Sans Pro Light" panose="020B0403030403020204" pitchFamily="34" charset="0"/>
-              </a:rPr>
-              <a:t>In the Bayesian setting a probabilistic program is a description of how to compute the posterior distribution. The essence of computation in Stan is dealing with the logarithm of the posterior probability density.</a:t>
-            </a:r>
-          </a:p>
-          <a:p>
-            <a:endParaRPr lang="en-US" sz="2000" dirty="0">
-              <a:latin typeface="Source Sans Pro Light" panose="020B0403030403020204" pitchFamily="34" charset="0"/>
-              <a:ea typeface="Source Sans Pro Light" panose="020B0403030403020204" pitchFamily="34" charset="0"/>
-            </a:endParaRPr>
-          </a:p>
-          <a:p>
-            <a:r>
-              <a:rPr lang="en-US" sz="2000" dirty="0">
-                <a:latin typeface="Source Sans Pro Light" panose="020B0403030403020204" pitchFamily="34" charset="0"/>
-                <a:ea typeface="Source Sans Pro Light" panose="020B0403030403020204" pitchFamily="34" charset="0"/>
-              </a:rPr>
-              <a:t>In practice </a:t>
-            </a:r>
-            <a:r>
-              <a:rPr lang="en-US" sz="2000" dirty="0">
-                <a:latin typeface="Consolas" panose="020B0609020204030204" pitchFamily="49" charset="0"/>
-                <a:ea typeface="Source Sans Pro Light" panose="020B0403030403020204" pitchFamily="34" charset="0"/>
-              </a:rPr>
-              <a:t>y[</a:t>
-            </a:r>
-            <a:r>
-              <a:rPr lang="en-US" sz="2000" dirty="0" err="1">
-                <a:latin typeface="Consolas" panose="020B0609020204030204" pitchFamily="49" charset="0"/>
-                <a:ea typeface="Source Sans Pro Light" panose="020B0403030403020204" pitchFamily="34" charset="0"/>
-              </a:rPr>
-              <a:t>i</a:t>
-            </a:r>
-            <a:r>
-              <a:rPr lang="en-US" sz="2000" dirty="0">
-                <a:latin typeface="Consolas" panose="020B0609020204030204" pitchFamily="49" charset="0"/>
-                <a:ea typeface="Source Sans Pro Light" panose="020B0403030403020204" pitchFamily="34" charset="0"/>
-              </a:rPr>
-              <a:t>] ~ normal(mu, sigma);</a:t>
-            </a:r>
-            <a:r>
-              <a:rPr lang="en-US" sz="2000" dirty="0">
-                <a:latin typeface="Source Sans Pro Light" panose="020B0403030403020204" pitchFamily="34" charset="0"/>
-                <a:ea typeface="Source Sans Pro Light" panose="020B0403030403020204" pitchFamily="34" charset="0"/>
-              </a:rPr>
-              <a:t> multiplies the current posterior probability by the density of the </a:t>
-            </a:r>
-            <a:r>
-              <a:rPr lang="en-US" sz="2000" dirty="0">
-                <a:latin typeface="Consolas" panose="020B0609020204030204" pitchFamily="49" charset="0"/>
-                <a:ea typeface="Source Sans Pro Light" panose="020B0403030403020204" pitchFamily="34" charset="0"/>
-              </a:rPr>
-              <a:t>normal</a:t>
-            </a:r>
-            <a:r>
-              <a:rPr lang="en-US" sz="2000" dirty="0">
-                <a:latin typeface="Source Sans Pro Light" panose="020B0403030403020204" pitchFamily="34" charset="0"/>
-                <a:ea typeface="Source Sans Pro Light" panose="020B0403030403020204" pitchFamily="34" charset="0"/>
-              </a:rPr>
-              <a:t> distribution at </a:t>
-            </a:r>
-            <a:r>
-              <a:rPr lang="en-US" sz="2000" dirty="0">
-                <a:latin typeface="Consolas" panose="020B0609020204030204" pitchFamily="49" charset="0"/>
-                <a:ea typeface="Source Sans Pro Light" panose="020B0403030403020204" pitchFamily="34" charset="0"/>
-              </a:rPr>
-              <a:t>y[</a:t>
-            </a:r>
-            <a:r>
-              <a:rPr lang="en-US" sz="2000" dirty="0" err="1">
-                <a:latin typeface="Consolas" panose="020B0609020204030204" pitchFamily="49" charset="0"/>
-                <a:ea typeface="Source Sans Pro Light" panose="020B0403030403020204" pitchFamily="34" charset="0"/>
-              </a:rPr>
-              <a:t>i</a:t>
-            </a:r>
-            <a:r>
-              <a:rPr lang="en-US" sz="2000" dirty="0">
-                <a:latin typeface="Consolas" panose="020B0609020204030204" pitchFamily="49" charset="0"/>
-                <a:ea typeface="Source Sans Pro Light" panose="020B0403030403020204" pitchFamily="34" charset="0"/>
-              </a:rPr>
-              <a:t>]</a:t>
-            </a:r>
-            <a:r>
-              <a:rPr lang="en-US" sz="2000" dirty="0">
-                <a:latin typeface="Source Sans Pro Light" panose="020B0403030403020204" pitchFamily="34" charset="0"/>
-                <a:ea typeface="Source Sans Pro Light" panose="020B0403030403020204" pitchFamily="34" charset="0"/>
-              </a:rPr>
-              <a:t>.</a:t>
-            </a:r>
-          </a:p>
-          <a:p>
-            <a:endParaRPr lang="en-US" sz="2000" dirty="0">
-              <a:latin typeface="Source Sans Pro Light" panose="020B0403030403020204" pitchFamily="34" charset="0"/>
-              <a:ea typeface="Source Sans Pro Light" panose="020B0403030403020204" pitchFamily="34" charset="0"/>
-            </a:endParaRPr>
-          </a:p>
-          <a:p>
-            <a:r>
-              <a:rPr lang="en-US" sz="2000" dirty="0">
-                <a:latin typeface="Source Sans Pro Light" panose="020B0403030403020204" pitchFamily="34" charset="0"/>
-                <a:ea typeface="Source Sans Pro Light" panose="020B0403030403020204" pitchFamily="34" charset="0"/>
-              </a:rPr>
-              <a:t>This is the same as an increment of current log-probability by the log-density of the normal distribution at </a:t>
-            </a:r>
-            <a:r>
-              <a:rPr lang="en-US" sz="2000" dirty="0">
-                <a:latin typeface="Consolas" panose="020B0609020204030204" pitchFamily="49" charset="0"/>
-                <a:ea typeface="Source Sans Pro Light" panose="020B0403030403020204" pitchFamily="34" charset="0"/>
-              </a:rPr>
-              <a:t>y[</a:t>
-            </a:r>
-            <a:r>
-              <a:rPr lang="en-US" sz="2000" dirty="0" err="1">
-                <a:latin typeface="Consolas" panose="020B0609020204030204" pitchFamily="49" charset="0"/>
-                <a:ea typeface="Source Sans Pro Light" panose="020B0403030403020204" pitchFamily="34" charset="0"/>
-              </a:rPr>
-              <a:t>i</a:t>
-            </a:r>
-            <a:r>
-              <a:rPr lang="en-US" sz="2000" dirty="0">
-                <a:latin typeface="Consolas" panose="020B0609020204030204" pitchFamily="49" charset="0"/>
-                <a:ea typeface="Source Sans Pro Light" panose="020B0403030403020204" pitchFamily="34" charset="0"/>
-              </a:rPr>
-              <a:t>]</a:t>
-            </a:r>
-            <a:r>
-              <a:rPr lang="en-US" sz="2000" dirty="0">
-                <a:latin typeface="Source Sans Pro Light" panose="020B0403030403020204" pitchFamily="34" charset="0"/>
-                <a:ea typeface="Source Sans Pro Light" panose="020B0403030403020204" pitchFamily="34" charset="0"/>
-              </a:rPr>
-              <a:t>.</a:t>
-            </a:r>
-          </a:p>
-          <a:p>
-            <a:endParaRPr lang="en-US" sz="2000" dirty="0">
-              <a:latin typeface="Source Sans Pro Light" panose="020B0403030403020204" pitchFamily="34" charset="0"/>
-              <a:ea typeface="Source Sans Pro Light" panose="020B0403030403020204" pitchFamily="34" charset="0"/>
-            </a:endParaRPr>
-          </a:p>
-          <a:p>
-            <a:r>
-              <a:rPr lang="en-US" sz="2000" dirty="0">
-                <a:latin typeface="Source Sans Pro Light" panose="020B0403030403020204" pitchFamily="34" charset="0"/>
-                <a:ea typeface="Source Sans Pro Light" panose="020B0403030403020204" pitchFamily="34" charset="0"/>
-              </a:rPr>
-              <a:t>Indeed, we can replace </a:t>
-            </a:r>
-            <a:r>
-              <a:rPr lang="en-US" sz="2000" dirty="0">
-                <a:latin typeface="Consolas" panose="020B0609020204030204" pitchFamily="49" charset="0"/>
-                <a:ea typeface="Source Sans Pro Light" panose="020B0403030403020204" pitchFamily="34" charset="0"/>
-              </a:rPr>
-              <a:t>y[</a:t>
-            </a:r>
-            <a:r>
-              <a:rPr lang="en-US" sz="2000" dirty="0" err="1">
-                <a:latin typeface="Consolas" panose="020B0609020204030204" pitchFamily="49" charset="0"/>
-                <a:ea typeface="Source Sans Pro Light" panose="020B0403030403020204" pitchFamily="34" charset="0"/>
-              </a:rPr>
-              <a:t>i</a:t>
-            </a:r>
-            <a:r>
-              <a:rPr lang="en-US" sz="2000" dirty="0">
-                <a:latin typeface="Consolas" panose="020B0609020204030204" pitchFamily="49" charset="0"/>
-                <a:ea typeface="Source Sans Pro Light" panose="020B0403030403020204" pitchFamily="34" charset="0"/>
-              </a:rPr>
-              <a:t>] ~ normal(mu, sigma);</a:t>
-            </a:r>
-            <a:r>
-              <a:rPr lang="en-US" sz="2000" dirty="0">
-                <a:latin typeface="Source Sans Pro Light" panose="020B0403030403020204" pitchFamily="34" charset="0"/>
-                <a:ea typeface="Source Sans Pro Light" panose="020B0403030403020204" pitchFamily="34" charset="0"/>
-              </a:rPr>
-              <a:t> with </a:t>
-            </a:r>
-            <a:r>
-              <a:rPr lang="en-US" sz="2000" dirty="0">
-                <a:latin typeface="Consolas" panose="020B0609020204030204" pitchFamily="49" charset="0"/>
-                <a:ea typeface="Source Sans Pro Light" panose="020B0403030403020204" pitchFamily="34" charset="0"/>
-              </a:rPr>
-              <a:t>target += </a:t>
-            </a:r>
-            <a:r>
-              <a:rPr lang="en-US" sz="2000" dirty="0" err="1">
-                <a:latin typeface="Consolas" panose="020B0609020204030204" pitchFamily="49" charset="0"/>
-                <a:ea typeface="Source Sans Pro Light" panose="020B0403030403020204" pitchFamily="34" charset="0"/>
-              </a:rPr>
-              <a:t>normal_lpdf</a:t>
-            </a:r>
-            <a:r>
-              <a:rPr lang="en-US" sz="2000" dirty="0">
-                <a:latin typeface="Consolas" panose="020B0609020204030204" pitchFamily="49" charset="0"/>
-                <a:ea typeface="Source Sans Pro Light" panose="020B0403030403020204" pitchFamily="34" charset="0"/>
-              </a:rPr>
-              <a:t>(y | mu, sigma)</a:t>
-            </a:r>
-            <a:r>
-              <a:rPr lang="en-US" sz="2000" dirty="0">
-                <a:latin typeface="Source Sans Pro Light" panose="020B0403030403020204" pitchFamily="34" charset="0"/>
-                <a:ea typeface="Source Sans Pro Light" panose="020B0403030403020204" pitchFamily="34" charset="0"/>
-              </a:rPr>
-              <a:t>.</a:t>
-            </a:r>
-            <a:endParaRPr lang="en-US" sz="2000" dirty="0">
-              <a:latin typeface="Consolas" panose="020B0609020204030204" pitchFamily="49" charset="0"/>
-              <a:ea typeface="Source Sans Pro Light" panose="020B0403030403020204" pitchFamily="34" charset="0"/>
-            </a:endParaRPr>
-          </a:p>
-          <a:p>
-            <a:endParaRPr lang="en-US" dirty="0"/>
           </a:p>
         </p:txBody>
       </p:sp>
@@ -12862,121 +12496,6 @@
               </a:rPr>
               <a:pPr algn="ctr"/>
               <a:t>31</a:t>
-            </a:fld>
-            <a:endParaRPr lang="LID4096" sz="1600" b="1" dirty="0">
-              <a:solidFill>
-                <a:srgbClr val="EF1209"/>
-              </a:solidFill>
-              <a:latin typeface="Source Sans Pro" panose="020B0503030403020204" pitchFamily="34" charset="0"/>
-              <a:ea typeface="Source Sans Pro" panose="020B0503030403020204" pitchFamily="34" charset="0"/>
-            </a:endParaRPr>
-          </a:p>
-        </p:txBody>
-      </p:sp>
-    </p:spTree>
-    <p:extLst>
-      <p:ext uri="{BB962C8B-B14F-4D97-AF65-F5344CB8AC3E}">
-        <p14:creationId xmlns:p14="http://schemas.microsoft.com/office/powerpoint/2010/main" val="2683307699"/>
-      </p:ext>
-    </p:extLst>
-  </p:cSld>
-  <p:clrMapOvr>
-    <a:masterClrMapping/>
-  </p:clrMapOvr>
-</p:sld>
-</file>
-
-<file path=ppt/slides/slide32.xml><?xml version="1.0" encoding="utf-8"?>
-<p:sld xmlns:a="http://schemas.openxmlformats.org/drawingml/2006/main" xmlns:r="http://schemas.openxmlformats.org/officeDocument/2006/relationships" xmlns:p="http://schemas.openxmlformats.org/presentationml/2006/main">
-  <p:cSld>
-    <p:spTree>
-      <p:nvGrpSpPr>
-        <p:cNvPr id="1" name=""/>
-        <p:cNvGrpSpPr/>
-        <p:nvPr/>
-      </p:nvGrpSpPr>
-      <p:grpSpPr>
-        <a:xfrm>
-          <a:off x="0" y="0"/>
-          <a:ext cx="0" cy="0"/>
-          <a:chOff x="0" y="0"/>
-          <a:chExt cx="0" cy="0"/>
-        </a:xfrm>
-      </p:grpSpPr>
-      <p:sp>
-        <p:nvSpPr>
-          <p:cNvPr id="2" name="Title 1">
-            <a:extLst>
-              <a:ext uri="{FF2B5EF4-FFF2-40B4-BE49-F238E27FC236}">
-                <a16:creationId xmlns:a16="http://schemas.microsoft.com/office/drawing/2014/main" id="{5488FAB6-27FF-4F6E-B6A3-2E4E1E84283E}"/>
-              </a:ext>
-            </a:extLst>
-          </p:cNvPr>
-          <p:cNvSpPr>
-            <a:spLocks noGrp="1"/>
-          </p:cNvSpPr>
-          <p:nvPr>
-            <p:ph type="title"/>
-          </p:nvPr>
-        </p:nvSpPr>
-        <p:spPr/>
-        <p:txBody>
-          <a:bodyPr>
-            <a:normAutofit/>
-          </a:bodyPr>
-          <a:lstStyle/>
-          <a:p>
-            <a:r>
-              <a:rPr lang="en-US" sz="2800" b="1" dirty="0">
-                <a:latin typeface="Source Sans Pro" panose="020B0503030403020204" pitchFamily="34" charset="0"/>
-                <a:ea typeface="Source Sans Pro" panose="020B0503030403020204" pitchFamily="34" charset="0"/>
-              </a:rPr>
-              <a:t>Presenting models</a:t>
-            </a:r>
-            <a:endParaRPr lang="LID4096" sz="2800" b="1" dirty="0">
-              <a:latin typeface="Source Sans Pro" panose="020B0503030403020204" pitchFamily="34" charset="0"/>
-              <a:ea typeface="Source Sans Pro" panose="020B0503030403020204" pitchFamily="34" charset="0"/>
-            </a:endParaRPr>
-          </a:p>
-        </p:txBody>
-      </p:sp>
-      <p:sp>
-        <p:nvSpPr>
-          <p:cNvPr id="5" name="Slide Number Placeholder 4">
-            <a:extLst>
-              <a:ext uri="{FF2B5EF4-FFF2-40B4-BE49-F238E27FC236}">
-                <a16:creationId xmlns:a16="http://schemas.microsoft.com/office/drawing/2014/main" id="{32359CFB-E8AA-4FDD-A4C4-214EF48D5737}"/>
-              </a:ext>
-            </a:extLst>
-          </p:cNvPr>
-          <p:cNvSpPr>
-            <a:spLocks noGrp="1"/>
-          </p:cNvSpPr>
-          <p:nvPr>
-            <p:ph type="sldNum" sz="quarter" idx="12"/>
-          </p:nvPr>
-        </p:nvSpPr>
-        <p:spPr>
-          <a:xfrm>
-            <a:off x="8611149" y="5216685"/>
-            <a:ext cx="532852" cy="498315"/>
-          </a:xfrm>
-        </p:spPr>
-        <p:txBody>
-          <a:bodyPr/>
-          <a:lstStyle/>
-          <a:p>
-            <a:pPr algn="ctr"/>
-            <a:fld id="{96EFF5A7-69E0-4703-97D0-8078648202E5}" type="slidenum">
-              <a:rPr lang="LID4096" sz="1600" b="1">
-                <a:solidFill>
-                  <a:srgbClr val="EF1209"/>
-                </a:solidFill>
-                <a:latin typeface="Source Sans Pro" panose="020B0503030403020204" pitchFamily="34" charset="0"/>
-                <a:ea typeface="Source Sans Pro" panose="020B0503030403020204" pitchFamily="34" charset="0"/>
-              </a:rPr>
-              <a:pPr algn="ctr"/>
-              <a:t>32</a:t>
             </a:fld>
             <a:endParaRPr lang="LID4096" sz="1600" b="1" dirty="0">
               <a:solidFill>
@@ -13031,7 +12550,7 @@
 </p:sld>
 </file>
 
-<file path=ppt/slides/slide33.xml><?xml version="1.0" encoding="utf-8"?>
+<file path=ppt/slides/slide32.xml><?xml version="1.0" encoding="utf-8"?>
 <p:sld xmlns:a="http://schemas.openxmlformats.org/drawingml/2006/main" xmlns:r="http://schemas.openxmlformats.org/officeDocument/2006/relationships" xmlns:p="http://schemas.openxmlformats.org/presentationml/2006/main">
   <p:cSld>
     <p:spTree>
@@ -13084,7 +12603,7 @@
                 <a:ea typeface="Source Sans Pro" panose="020B0503030403020204" pitchFamily="34" charset="0"/>
               </a:rPr>
               <a:pPr algn="ctr"/>
-              <a:t>33</a:t>
+              <a:t>32</a:t>
             </a:fld>
             <a:endParaRPr lang="LID4096" sz="1600" b="1" dirty="0">
               <a:solidFill>
@@ -13145,7 +12664,7 @@
 </p:sld>
 </file>
 
-<file path=ppt/slides/slide34.xml><?xml version="1.0" encoding="utf-8"?>
+<file path=ppt/slides/slide33.xml><?xml version="1.0" encoding="utf-8"?>
 <p:sld xmlns:a="http://schemas.openxmlformats.org/drawingml/2006/main" xmlns:r="http://schemas.openxmlformats.org/officeDocument/2006/relationships" xmlns:p="http://schemas.openxmlformats.org/presentationml/2006/main">
   <p:cSld>
     <p:spTree>
@@ -13235,7 +12754,7 @@
                 <a:ea typeface="Source Sans Pro" panose="020B0503030403020204" pitchFamily="34" charset="0"/>
               </a:rPr>
               <a:pPr algn="ctr"/>
-              <a:t>34</a:t>
+              <a:t>33</a:t>
             </a:fld>
             <a:endParaRPr lang="LID4096" sz="1600" b="1" dirty="0">
               <a:solidFill>
